--- a/m1/diapositivos/sessao-06-m1-f08.pptx
+++ b/m1/diapositivos/sessao-06-m1-f08.pptx
@@ -2587,13 +2587,10 @@
               <a:lnSpc>
                 <a:spcPct val="120000"/>
               </a:lnSpc>
-              <a:spcAft>
-                <a:spcPts val="1000"/>
-              </a:spcAft>
-              <a:buNone/>
-            </a:pPr>
-            <a:r>
-              <a:rPr lang="en-US" sz="2300" dirty="0">
+              <a:buNone/>
+            </a:pPr>
+            <a:r>
+              <a:rPr lang="en-US" sz="2300" b="1" dirty="0">
                 <a:solidFill>
                   <a:srgbClr val="F2F0EA"/>
                 </a:solidFill>
@@ -2601,18 +2598,12 @@
                 <a:ea typeface="Georgia" pitchFamily="34" charset="-122"/>
                 <a:cs typeface="Georgia" pitchFamily="34" charset="-120"/>
               </a:rPr>
-              <a:t>Complemento do nome: completa o sentido de um nome, muitas vezes derivado de um verbo (defender a cidade → a defesa da cidade).</a:t>
-            </a:r>
-            <a:endParaRPr lang="en-US" sz="2300" dirty="0"/>
-          </a:p>
-          <a:p>
+              <a:t>Complemento do nome</a:t>
+            </a:r>
             <a:pPr indent="0" marL="0">
               <a:lnSpc>
                 <a:spcPct val="120000"/>
               </a:lnSpc>
-              <a:spcAft>
-                <a:spcPts val="1000"/>
-              </a:spcAft>
               <a:buNone/>
             </a:pPr>
             <a:r>
@@ -2624,22 +2615,16 @@
                 <a:ea typeface="Georgia" pitchFamily="34" charset="-122"/>
                 <a:cs typeface="Georgia" pitchFamily="34" charset="-120"/>
               </a:rPr>
-              <a:t>Complemento do adjetivo: completa o sentido de um adjetivo (cousas pouco amigas da natureza).</a:t>
-            </a:r>
-            <a:endParaRPr lang="en-US" sz="2300" dirty="0"/>
-          </a:p>
-          <a:p>
+              <a:t>: completa o sentido de um nome, muitas vezes derivado de um verbo (defender a cidade → a defesa da cidade). </a:t>
+            </a:r>
             <a:pPr indent="0" marL="0">
               <a:lnSpc>
                 <a:spcPct val="120000"/>
               </a:lnSpc>
-              <a:spcAft>
-                <a:spcPts val="1000"/>
-              </a:spcAft>
-              <a:buNone/>
-            </a:pPr>
-            <a:r>
-              <a:rPr lang="en-US" sz="2300" dirty="0">
+              <a:buNone/>
+            </a:pPr>
+            <a:r>
+              <a:rPr lang="en-US" sz="2300" b="1" dirty="0">
                 <a:solidFill>
                   <a:srgbClr val="F2F0EA"/>
                 </a:solidFill>
@@ -2647,7 +2632,58 @@
                 <a:ea typeface="Georgia" pitchFamily="34" charset="-122"/>
                 <a:cs typeface="Georgia" pitchFamily="34" charset="-120"/>
               </a:rPr>
-              <a:t>Complemento oblíquo: completa o sentido de um verbo, com preposição, e não é substituível por «lhe» (Todos correram para os paços).</a:t>
+              <a:t>Complemento do adjetivo</a:t>
+            </a:r>
+            <a:pPr indent="0" marL="0">
+              <a:lnSpc>
+                <a:spcPct val="120000"/>
+              </a:lnSpc>
+              <a:buNone/>
+            </a:pPr>
+            <a:r>
+              <a:rPr lang="en-US" sz="2300" dirty="0">
+                <a:solidFill>
+                  <a:srgbClr val="F2F0EA"/>
+                </a:solidFill>
+                <a:latin typeface="Georgia" pitchFamily="34" charset="0"/>
+                <a:ea typeface="Georgia" pitchFamily="34" charset="-122"/>
+                <a:cs typeface="Georgia" pitchFamily="34" charset="-120"/>
+              </a:rPr>
+              <a:t>: completa o sentido de um adjetivo (cousas pouco amigas da natureza). </a:t>
+            </a:r>
+            <a:pPr indent="0" marL="0">
+              <a:lnSpc>
+                <a:spcPct val="120000"/>
+              </a:lnSpc>
+              <a:buNone/>
+            </a:pPr>
+            <a:r>
+              <a:rPr lang="en-US" sz="2300" b="1" dirty="0">
+                <a:solidFill>
+                  <a:srgbClr val="F2F0EA"/>
+                </a:solidFill>
+                <a:latin typeface="Georgia" pitchFamily="34" charset="0"/>
+                <a:ea typeface="Georgia" pitchFamily="34" charset="-122"/>
+                <a:cs typeface="Georgia" pitchFamily="34" charset="-120"/>
+              </a:rPr>
+              <a:t>Complemento oblíquo</a:t>
+            </a:r>
+            <a:pPr indent="0" marL="0">
+              <a:lnSpc>
+                <a:spcPct val="120000"/>
+              </a:lnSpc>
+              <a:buNone/>
+            </a:pPr>
+            <a:r>
+              <a:rPr lang="en-US" sz="2300" dirty="0">
+                <a:solidFill>
+                  <a:srgbClr val="F2F0EA"/>
+                </a:solidFill>
+                <a:latin typeface="Georgia" pitchFamily="34" charset="0"/>
+                <a:ea typeface="Georgia" pitchFamily="34" charset="-122"/>
+                <a:cs typeface="Georgia" pitchFamily="34" charset="-120"/>
+              </a:rPr>
+              <a:t>: completa o sentido de um verbo, com preposição, e não é substituível por «lhe» (Todos correram para os paços).</a:t>
             </a:r>
             <a:endParaRPr lang="en-US" sz="2300" dirty="0"/>
           </a:p>
@@ -4651,7 +4687,47 @@
                 <a:ea typeface="Georgia" pitchFamily="34" charset="-122"/>
                 <a:cs typeface="Georgia" pitchFamily="34" charset="-120"/>
               </a:rPr>
-              <a:t>Pergunta ao nome ou ao adjetivo: exige este complemento? Se o tiro, a palavra fica a pedir alguma coisa («a defesa» de quê? «cheias» de quê?): é complemento. Se posso tirar sem faltar nada («a casa de pedra» → «a casa»), é modificador.</a:t>
+              <a:t>Pergunta ao nome ou ao adjetivo: </a:t>
+            </a:r>
+            <a:pPr indent="0" marL="0">
+              <a:lnSpc>
+                <a:spcPct val="120000"/>
+              </a:lnSpc>
+              <a:spcAft>
+                <a:spcPts val="1000"/>
+              </a:spcAft>
+              <a:buNone/>
+            </a:pPr>
+            <a:r>
+              <a:rPr lang="en-US" sz="2300" b="1" dirty="0">
+                <a:solidFill>
+                  <a:srgbClr val="F2F0EA"/>
+                </a:solidFill>
+                <a:latin typeface="Georgia" pitchFamily="34" charset="0"/>
+                <a:ea typeface="Georgia" pitchFamily="34" charset="-122"/>
+                <a:cs typeface="Georgia" pitchFamily="34" charset="-120"/>
+              </a:rPr>
+              <a:t>exige</a:t>
+            </a:r>
+            <a:pPr indent="0" marL="0">
+              <a:lnSpc>
+                <a:spcPct val="120000"/>
+              </a:lnSpc>
+              <a:spcAft>
+                <a:spcPts val="1000"/>
+              </a:spcAft>
+              <a:buNone/>
+            </a:pPr>
+            <a:r>
+              <a:rPr lang="en-US" sz="2300" dirty="0">
+                <a:solidFill>
+                  <a:srgbClr val="F2F0EA"/>
+                </a:solidFill>
+                <a:latin typeface="Georgia" pitchFamily="34" charset="0"/>
+                <a:ea typeface="Georgia" pitchFamily="34" charset="-122"/>
+                <a:cs typeface="Georgia" pitchFamily="34" charset="-120"/>
+              </a:rPr>
+              <a:t> este complemento? Se o tiro, a palavra fica a pedir alguma coisa («a defesa» de quê? «cheias» de quê?): é complemento. Se posso tirar sem faltar nada («a casa de pedra» → «a casa»), é modificador.</a:t>
             </a:r>
             <a:endParaRPr lang="en-US" sz="2300" dirty="0"/>
           </a:p>
